--- a/_extensions/cerema/reference.pptx
+++ b/_extensions/cerema/reference.pptx
@@ -2940,8 +2940,8 @@
         </p:nvSpPr>
         <p:spPr>
           <a:xfrm>
-            <a:off x="6722269" y="1908174"/>
-            <a:ext cx="5801694" cy="4230073"/>
+            <a:off x="1190610" y="1519867"/>
+            <a:ext cx="11104000" cy="1100000"/>
           </a:xfrm>
         </p:spPr>
         <p:txBody>
@@ -3044,8 +3044,8 @@
         </p:nvSpPr>
         <p:spPr>
           <a:xfrm>
-            <a:off x="1190625" y="1343025"/>
-            <a:ext cx="4618038" cy="4795838"/>
+            <a:off x="1190610" y="2719867"/>
+            <a:ext cx="11104000" cy="3980133"/>
           </a:xfrm>
         </p:spPr>
         <p:txBody>
